--- a/docs/latest-digest.pptx
+++ b/docs/latest-digest.pptx
@@ -3534,7 +3534,7 @@
                   <a:srgbClr val="1E1E1E"/>
                 </a:solidFill>
               </a:rPr>
-              <a:t>EN: The findings suggest that enhancing intratumoral Lactobacillus johnsonii may improve the efficacy of anti-PD-1 therapies in HCC patients. </a:t>
+              <a:t>EN: The presence of Lactobacillus johnsonii in HCC patients may serve as a novel biomarker for predicting disease-free survival, suggesting potential therapeutic implications. </a:t>
             </a:r>
             <a:endParaRPr lang="en-US" sz="1000" dirty="0"/>
           </a:p>
@@ -3551,7 +3551,7 @@
                   <a:srgbClr val="1E1E1E"/>
                 </a:solidFill>
               </a:rPr>
-              <a:t>ZH: 研究結果表明，增強腫瘤內 Lactobacillus johnsonii 可能改善 HCC 患者抗 PD-1 治療的療效。</a:t>
+              <a:t>ZH: Lactobacillus johnsonii 在 HCC 患者中的存在可能作為預測無病生存的新型生物標誌物，暗示潛在的治療意義。</a:t>
             </a:r>
             <a:endParaRPr lang="en-US" sz="1000" dirty="0"/>
           </a:p>
@@ -3694,7 +3694,7 @@
                   <a:srgbClr val="1E1E1E"/>
                 </a:solidFill>
               </a:rPr>
-              <a:t>EN: Future studies should explore the potential of Lactobacillus johnsonii and its metabolites as adjunctive therapies in HCC treatment. </a:t>
+              <a:t>EN: Future research should explore the clinical application of Lactobacillus johnsonii and its metabolites in combination with immunotherapies for HCC. </a:t>
             </a:r>
             <a:endParaRPr lang="en-US" sz="1000" dirty="0"/>
           </a:p>
@@ -3711,7 +3711,7 @@
                   <a:srgbClr val="1E1E1E"/>
                 </a:solidFill>
               </a:rPr>
-              <a:t>ZH: 未來的研究應探討 Lactobacillus johnsonii 及其代謝產物作為 HCC 治療輔助療法的潛力。</a:t>
+              <a:t>ZH: 未來的研究應探索 Lactobacillus johnsonii 及其代謝產物與 HCC 免疫療法結合的臨床應用。</a:t>
             </a:r>
             <a:endParaRPr lang="en-US" sz="1000" dirty="0"/>
           </a:p>
@@ -4079,7 +4079,7 @@
                 <a:ea typeface="Arial" pitchFamily="34" charset="-122"/>
                 <a:cs typeface="Arial" pitchFamily="34" charset="-120"/>
               </a:rPr>
-              <a:t>High expression of nicotinamide N-methyltransferase (NNMT) in CAFs reduces H3K27me3 at the ANGPTL4 promoter, increasing ANGPTL4 secretion.</a:t>
+              <a:t>High expression of nicotinamide N-methyltransferase (NNMT) in CAFs reduces H3K27me3 enrichment at the ANGPTL4 promoter, leading to increased ANGPTL4 secretion.</a:t>
             </a:r>
             <a:endParaRPr lang="en-US" sz="1000" dirty="0"/>
           </a:p>
@@ -4100,7 +4100,7 @@
                 <a:ea typeface="Arial" pitchFamily="34" charset="-122"/>
                 <a:cs typeface="Arial" pitchFamily="34" charset="-120"/>
               </a:rPr>
-              <a:t>ANGPTL4 enhances aerobic glycolysis in HCC cells and upregulates PD-L1 expression, facilitating immune evasion.</a:t>
+              <a:t>ANGPTL4 enhances aerobic glycolysis in HCC cells and upregulates PD-L1 expression, facilitating tumor immune evasion.</a:t>
             </a:r>
             <a:endParaRPr lang="en-US" sz="1000" dirty="0"/>
           </a:p>
@@ -4142,7 +4142,7 @@
                 <a:ea typeface="Arial" pitchFamily="34" charset="-122"/>
                 <a:cs typeface="Arial" pitchFamily="34" charset="-120"/>
               </a:rPr>
-              <a:t>The study identifies a metabolic-epigenetic cascade in CAFs that contributes to immune evasion in HCC.</a:t>
+              <a:t>This study uncovers a metabolic-epigenetic cascade in CAFs that contributes to immune evasion in HCC.</a:t>
             </a:r>
             <a:endParaRPr lang="en-US" sz="1000" dirty="0"/>
           </a:p>
@@ -4245,7 +4245,7 @@
                 <a:ea typeface="Microsoft JhengHei" pitchFamily="34" charset="-122"/>
                 <a:cs typeface="Microsoft JhengHei" pitchFamily="34" charset="-120"/>
               </a:rPr>
-              <a:t>CAFs中高表達的煙酰胺N-甲基轉移酶（NNMT）降低ANGPTL4啟動子上的H3K27me3，增加ANGPTL4的分泌。</a:t>
+              <a:t>CAFs中高表達的煙酰胺N-甲基轉移酶（NNMT）減少ANGPTL4啟動子處的H3K27me3富集，導致ANGPTL4分泌增加。</a:t>
             </a:r>
             <a:endParaRPr lang="en-US" sz="1000" dirty="0"/>
           </a:p>
@@ -4266,7 +4266,7 @@
                 <a:ea typeface="Microsoft JhengHei" pitchFamily="34" charset="-122"/>
                 <a:cs typeface="Microsoft JhengHei" pitchFamily="34" charset="-120"/>
               </a:rPr>
-              <a:t>ANGPTL4增強HCC細胞的有氧糖解作用並上調PD-L1表達，促進免疫逃逸。</a:t>
+              <a:t>ANGPTL4增強HCC細胞的有氧糖解作用並上調PD-L1表達，促進腫瘤免疫逃逸。</a:t>
             </a:r>
             <a:endParaRPr lang="en-US" sz="1000" dirty="0"/>
           </a:p>
@@ -4287,7 +4287,7 @@
                 <a:ea typeface="Microsoft JhengHei" pitchFamily="34" charset="-122"/>
                 <a:cs typeface="Microsoft JhengHei" pitchFamily="34" charset="-120"/>
               </a:rPr>
-              <a:t>靶向NNMT-ANGPTL4軸恢復CD8+ T細胞活性並增強抗PD-L1療法的療效。</a:t>
+              <a:t>針對NNMT-ANGPTL4軸可恢復CD8+ T細胞活性並增強抗PD-L1療法的療效。</a:t>
             </a:r>
             <a:endParaRPr lang="en-US" sz="1000" dirty="0"/>
           </a:p>
@@ -4308,7 +4308,7 @@
                 <a:ea typeface="Microsoft JhengHei" pitchFamily="34" charset="-122"/>
                 <a:cs typeface="Microsoft JhengHei" pitchFamily="34" charset="-120"/>
               </a:rPr>
-              <a:t>該研究確定了CAFs中促進免疫逃逸的代謝-表觀遺傳級聯反應。</a:t>
+              <a:t>本研究揭示了CAFs中促進免疫逃逸的代謝-表觀遺傳級聯反應。</a:t>
             </a:r>
             <a:endParaRPr lang="en-US" sz="1000" dirty="0"/>
           </a:p>
@@ -4686,7 +4686,7 @@
                   <a:srgbClr val="1E1E1E"/>
                 </a:solidFill>
               </a:rPr>
-              <a:t>EN: Targeting the NNMT-ANGPTL4 axis could provide a novel therapeutic strategy to enhance immune responses in HCC patients. </a:t>
+              <a:t>EN: Targeting the NNMT-ANGPTL4 axis may provide a novel therapeutic strategy to enhance immune responses in HCC patients. </a:t>
             </a:r>
             <a:endParaRPr lang="en-US" sz="1000" dirty="0"/>
           </a:p>
@@ -4703,7 +4703,7 @@
                   <a:srgbClr val="1E1E1E"/>
                 </a:solidFill>
               </a:rPr>
-              <a:t>ZH: 靶向NNMT-ANGPTL4軸可能為增強HCC患者免疫反應提供新的治療策略。</a:t>
+              <a:t>ZH: 針對NNMT-ANGPTL4軸可能為增強HCC患者免疫反應提供新的治療策略。</a:t>
             </a:r>
             <a:endParaRPr lang="en-US" sz="1000" dirty="0"/>
           </a:p>
@@ -4846,7 +4846,7 @@
                   <a:srgbClr val="1E1E1E"/>
                 </a:solidFill>
               </a:rPr>
-              <a:t>EN: Future research should explore the broader implications of the NNMT-ANGPTL4 axis in other cancers and its potential as a biomarker for immunotherapy response. </a:t>
+              <a:t>EN: Future studies should explore the clinical implications of targeting the NNMT-ANGPTL4 axis in combination with existing immunotherapies. </a:t>
             </a:r>
             <a:endParaRPr lang="en-US" sz="1000" dirty="0"/>
           </a:p>
@@ -4863,7 +4863,7 @@
                   <a:srgbClr val="1E1E1E"/>
                 </a:solidFill>
               </a:rPr>
-              <a:t>ZH: 未來的研究應探討NNMT-ANGPTL4軸在其他癌症中的更廣泛影響及其作為免疫療法反應生物標誌物的潛力。</a:t>
+              <a:t>ZH: 未來的研究應探討將NNMT-ANGPTL4軸作為與現有免疫療法聯合使用的臨床意義。</a:t>
             </a:r>
             <a:endParaRPr lang="en-US" sz="1000" dirty="0"/>
           </a:p>
@@ -5231,7 +5231,7 @@
                 <a:ea typeface="Arial" pitchFamily="34" charset="-122"/>
                 <a:cs typeface="Arial" pitchFamily="34" charset="-120"/>
               </a:rPr>
-              <a:t>The depletion effect is Fc dependent, as mutating the Fc region to block Fc gamma receptor interaction prevents CD8 T cell depletion.</a:t>
+              <a:t>The depletion of CD8 T cells is Fc-dependent, with mutations in the Fc region preventing this effect and leading to effective immunotherapy.</a:t>
             </a:r>
             <a:endParaRPr lang="en-US" sz="1000" dirty="0"/>
           </a:p>
@@ -5252,7 +5252,7 @@
                 <a:ea typeface="Arial" pitchFamily="34" charset="-122"/>
                 <a:cs typeface="Arial" pitchFamily="34" charset="-120"/>
               </a:rPr>
-              <a:t>Depletion of PD-1+ CD8 T cells is mediated via activating Fc gamma receptor III, with phagocytic cells acting as the in vivo effectors.</a:t>
+              <a:t>Depletion is mediated by activating Fc gamma receptor III and involves phagocytic cells rather than natural killer cells.</a:t>
             </a:r>
             <a:endParaRPr lang="en-US" sz="1000" dirty="0"/>
           </a:p>
@@ -5294,7 +5294,7 @@
                 <a:ea typeface="Arial" pitchFamily="34" charset="-122"/>
                 <a:cs typeface="Arial" pitchFamily="34" charset="-120"/>
               </a:rPr>
-              <a:t>These findings suggest the need for careful consideration of Fc-functional anti-PD-1 antibodies in liver cancer and chronic viral infections.</a:t>
+              <a:t>The findings suggest that Fc-functional anti-PD-1 antibodies may have adverse effects in liver cancer and chronic viral infections.</a:t>
             </a:r>
             <a:endParaRPr lang="en-US" sz="1000" dirty="0"/>
           </a:p>
@@ -5397,7 +5397,7 @@
                 <a:ea typeface="Microsoft JhengHei" pitchFamily="34" charset="-122"/>
                 <a:cs typeface="Microsoft JhengHei" pitchFamily="34" charset="-120"/>
               </a:rPr>
-              <a:t>耗竭效應依賴Fc，因為突變Fc區域以阻止Fc伽馬受體相互作用可防止CD8 T細胞耗竭。</a:t>
+              <a:t>CD8 T細胞的耗竭依賴於Fc區域，Fc區域的突變可防止此效應並導致有效的免疫療法。</a:t>
             </a:r>
             <a:endParaRPr lang="en-US" sz="1000" dirty="0"/>
           </a:p>
@@ -5418,7 +5418,7 @@
                 <a:ea typeface="Microsoft JhengHei" pitchFamily="34" charset="-122"/>
                 <a:cs typeface="Microsoft JhengHei" pitchFamily="34" charset="-120"/>
               </a:rPr>
-              <a:t>PD-1+ CD8 T細胞的耗竭是通過激活Fc伽馬受體III介導的，吞噬細胞作為體內效應細胞。</a:t>
+              <a:t>耗竭是通過激活Fc伽瑪受體III介導的，並涉及吞噬細胞而非自然殺手細胞。</a:t>
             </a:r>
             <a:endParaRPr lang="en-US" sz="1000" dirty="0"/>
           </a:p>
@@ -5439,7 +5439,7 @@
                 <a:ea typeface="Microsoft JhengHei" pitchFamily="34" charset="-122"/>
                 <a:cs typeface="Microsoft JhengHei" pitchFamily="34" charset="-120"/>
               </a:rPr>
-              <a:t>在CT26模型中觀察到類似的腫瘤特異性CD8 T細胞耗竭，顯示對腫瘤控制的潛在負面影響。</a:t>
+              <a:t>在CT26模型中觀察到類似的腫瘤特異性CD8 T細胞耗竭，表明對腫瘤控制的潛在負面影響。</a:t>
             </a:r>
             <a:endParaRPr lang="en-US" sz="1000" dirty="0"/>
           </a:p>
@@ -5460,7 +5460,7 @@
                 <a:ea typeface="Microsoft JhengHei" pitchFamily="34" charset="-122"/>
                 <a:cs typeface="Microsoft JhengHei" pitchFamily="34" charset="-120"/>
               </a:rPr>
-              <a:t>這些發現提示在肝癌和慢性病毒感染中需謹慎考慮Fc功能性抗PD-1抗體。</a:t>
+              <a:t>研究結果表明，Fc功能性抗PD-1抗體在肝癌和慢性病毒感染中可能具有不利影響。</a:t>
             </a:r>
             <a:endParaRPr lang="en-US" sz="1000" dirty="0"/>
           </a:p>
@@ -5838,7 +5838,7 @@
                   <a:srgbClr val="1E1E1E"/>
                 </a:solidFill>
               </a:rPr>
-              <a:t>EN: The findings indicate that Fc-functional anti-PD-1 antibodies may have detrimental effects on CD8 T cell responses in the liver, which could compromise therapeutic efficacy in liver cancer and chronic infections. </a:t>
+              <a:t>EN: The study highlights the need to consider the Fc region of anti-PD-1 antibodies in clinical settings, particularly in liver cancer therapies. </a:t>
             </a:r>
             <a:endParaRPr lang="en-US" sz="1000" dirty="0"/>
           </a:p>
@@ -5855,7 +5855,7 @@
                   <a:srgbClr val="1E1E1E"/>
                 </a:solidFill>
               </a:rPr>
-              <a:t>ZH: 這些發現表明，Fc功能性抗PD-1抗體可能對肝臟中的CD8 T細胞反應產生不利影響，這可能會妨礙肝癌和慢性感染的治療效果。</a:t>
+              <a:t>ZH: 這項研究強調在臨床環境中考慮抗PD-1抗體的Fc區域的必要性，特別是在肝癌療法中。</a:t>
             </a:r>
             <a:endParaRPr lang="en-US" sz="1000" dirty="0"/>
           </a:p>
@@ -5998,7 +5998,7 @@
                   <a:srgbClr val="1E1E1E"/>
                 </a:solidFill>
               </a:rPr>
-              <a:t>EN: Future research should focus on optimizing the Fc region of anti-PD-1 antibodies to enhance their therapeutic efficacy while minimizing adverse effects. </a:t>
+              <a:t>EN: Future research should focus on optimizing the Fc region of PD-1 antibodies to enhance therapeutic efficacy while minimizing adverse effects. </a:t>
             </a:r>
             <a:endParaRPr lang="en-US" sz="1000" dirty="0"/>
           </a:p>
@@ -6015,7 +6015,7 @@
                   <a:srgbClr val="1E1E1E"/>
                 </a:solidFill>
               </a:rPr>
-              <a:t>ZH: 未來的研究應集中於優化抗PD-1抗體的Fc區域，以增強其治療效果，同時最小化不良影響。</a:t>
+              <a:t>ZH: 未來的研究應集中於優化PD-1抗體的Fc區域，以增強治療效果並最小化不良影響。</a:t>
             </a:r>
             <a:endParaRPr lang="en-US" sz="1000" dirty="0"/>
           </a:p>
@@ -6362,7 +6362,7 @@
                 <a:ea typeface="Arial" pitchFamily="34" charset="-122"/>
                 <a:cs typeface="Arial" pitchFamily="34" charset="-120"/>
               </a:rPr>
-              <a:t>The study evaluates the efficacy of combining transarterial chemoembolization (TACE) with PD-1 inhibitors as a conversion therapy for unresectable intermediate-advanced hepatocellular carcinoma (uHCC).</a:t>
+              <a:t>The study evaluates the efficacy of combining transarterial chemoembolization (TACE) with PD-1 inhibitors for patients with unresectable intermediate-advanced hepatocellular carcinoma (uHCC).</a:t>
             </a:r>
             <a:endParaRPr lang="en-US" sz="1000" dirty="0"/>
           </a:p>
@@ -6404,7 +6404,7 @@
                 <a:ea typeface="Arial" pitchFamily="34" charset="-122"/>
                 <a:cs typeface="Arial" pitchFamily="34" charset="-120"/>
               </a:rPr>
-              <a:t>The trial demonstrates a favorable safety profile for the combined approach, with manageable adverse effects.</a:t>
+              <a:t>The trial demonstrates a favorable safety profile for the combination therapy, with manageable adverse effects.</a:t>
             </a:r>
             <a:endParaRPr lang="en-US" sz="1000" dirty="0"/>
           </a:p>
@@ -6486,7 +6486,7 @@
                 <a:ea typeface="Microsoft JhengHei" pitchFamily="34" charset="-122"/>
                 <a:cs typeface="Microsoft JhengHei" pitchFamily="34" charset="-120"/>
               </a:rPr>
-              <a:t>本研究評估了將經動脈化療栓塞（TACE）與PD-1抑制劑結合用作不可切除中晚期肝細胞癌（uHCC）的轉化療法的有效性。</a:t>
+              <a:t>本研究評估了將經動脈化學栓塞（TACE）與PD-1抑制劑結合用於不可切除的中晚期肝細胞癌（uHCC）患者的療效。</a:t>
             </a:r>
             <a:endParaRPr lang="en-US" sz="1000" dirty="0"/>
           </a:p>
@@ -6507,7 +6507,7 @@
                 <a:ea typeface="Microsoft JhengHei" pitchFamily="34" charset="-122"/>
                 <a:cs typeface="Microsoft JhengHei" pitchFamily="34" charset="-120"/>
               </a:rPr>
-              <a:t>結果顯示，組合療法顯著改善了治療結果，相較於僅使用TACE。</a:t>
+              <a:t>結果顯示，聯合療法顯著改善了治療結果，相較於僅使用TACE。</a:t>
             </a:r>
             <a:endParaRPr lang="en-US" sz="1000" dirty="0"/>
           </a:p>
@@ -6528,7 +6528,7 @@
                 <a:ea typeface="Microsoft JhengHei" pitchFamily="34" charset="-122"/>
                 <a:cs typeface="Microsoft JhengHei" pitchFamily="34" charset="-120"/>
               </a:rPr>
-              <a:t>該試驗顯示組合療法具有良好的安全性，副作用可控。</a:t>
+              <a:t>該試驗顯示聯合療法具有良好的安全性，副作用可控。</a:t>
             </a:r>
             <a:endParaRPr lang="en-US" sz="1000" dirty="0"/>
           </a:p>
@@ -6861,7 +6861,7 @@
                   <a:srgbClr val="1E1E1E"/>
                 </a:solidFill>
               </a:rPr>
-              <a:t>EN: The combination of TACE and PD-1 inhibitors may offer a new therapeutic option for patients with uHCC, potentially leading to better surgical candidacy. </a:t>
+              <a:t>EN: The combination of TACE and PD-1 inhibitors presents a promising treatment strategy for patients with uHCC, potentially leading to better clinical outcomes. </a:t>
             </a:r>
             <a:endParaRPr lang="en-US" sz="1000" dirty="0"/>
           </a:p>
@@ -6878,7 +6878,7 @@
                   <a:srgbClr val="1E1E1E"/>
                 </a:solidFill>
               </a:rPr>
-              <a:t>ZH: TACE與PD-1抑制劑的結合可能為uHCC患者提供新的治療選擇，從而提高手術適應性。</a:t>
+              <a:t>ZH: TACE與PD-1抑制劑的聯合療法為uHCC患者提供了一種有前景的治療策略，可能導致更好的臨床結果。</a:t>
             </a:r>
             <a:endParaRPr lang="en-US" sz="1000" dirty="0"/>
           </a:p>
@@ -7021,7 +7021,7 @@
                   <a:srgbClr val="1E1E1E"/>
                 </a:solidFill>
               </a:rPr>
-              <a:t>EN: Future studies should focus on optimizing the timing and dosing of the combination therapy to maximize patient outcomes. </a:t>
+              <a:t>EN: Future research should focus on optimizing the timing and dosing of combination therapies to enhance efficacy. </a:t>
             </a:r>
             <a:endParaRPr lang="en-US" sz="1000" dirty="0"/>
           </a:p>
@@ -7038,7 +7038,7 @@
                   <a:srgbClr val="1E1E1E"/>
                 </a:solidFill>
               </a:rPr>
-              <a:t>ZH: 未來的研究應集中於優化組合療法的時機和劑量，以最大化患者的治療效果。</a:t>
+              <a:t>ZH: 未來的研究應集中於優化聯合療法的時機和劑量，以提高療效。</a:t>
             </a:r>
             <a:endParaRPr lang="en-US" sz="1000" dirty="0"/>
           </a:p>
@@ -7385,7 +7385,7 @@
                 <a:ea typeface="Arial" pitchFamily="34" charset="-122"/>
                 <a:cs typeface="Arial" pitchFamily="34" charset="-120"/>
               </a:rPr>
-              <a:t>Atezolizumab plus bevacizumab (Atez+Bev) demonstrated a 25.0% objective response rate (ORR) and a 75.0% disease control rate (DCR) as a second-line therapy after durvalumab plus tremelimumab (Dur+Tre).</a:t>
+              <a:t>Atezolizumab plus bevacizumab (Atez+Bev) demonstrated an objective response rate (ORR) of 25.0% and a disease control rate (DCR) of 75.0% as a second-line therapy after durvalumab plus tremelimumab (Dur+Tre).</a:t>
             </a:r>
             <a:endParaRPr lang="en-US" sz="1000" dirty="0"/>
           </a:p>
@@ -7406,7 +7406,7 @@
                 <a:ea typeface="Arial" pitchFamily="34" charset="-122"/>
                 <a:cs typeface="Arial" pitchFamily="34" charset="-120"/>
               </a:rPr>
-              <a:t>Two patients who were non-responsive to Dur+Tre achieved a tumor response with Atez+Bev, indicating potential benefits for this subgroup.</a:t>
+              <a:t>Two patients who were non-responsive to Dur+Tre achieved a tumor response with Atez+Bev, indicating potential efficacy in previously treated patients.</a:t>
             </a:r>
             <a:endParaRPr lang="en-US" sz="1000" dirty="0"/>
           </a:p>
@@ -7427,7 +7427,7 @@
                 <a:ea typeface="Arial" pitchFamily="34" charset="-122"/>
                 <a:cs typeface="Arial" pitchFamily="34" charset="-120"/>
               </a:rPr>
-              <a:t>Common adverse events included pruritus for both regimens, while colitis and diarrhea were more prevalent in the Dur+Tre group and proteinuria, hyperammonemia, and bleeding were more common in the Atez+Bev group.</a:t>
+              <a:t>Common adverse events included pruritus for both regimens, while colitis and diarrhea were more prevalent in the Dur+Tre group, and proteinuria, hyperammonemia, and bleeding were more common in the Atez+Bev group.</a:t>
             </a:r>
             <a:endParaRPr lang="en-US" sz="1000" dirty="0"/>
           </a:p>
@@ -7509,7 +7509,7 @@
                 <a:ea typeface="Microsoft JhengHei" pitchFamily="34" charset="-122"/>
                 <a:cs typeface="Microsoft JhengHei" pitchFamily="34" charset="-120"/>
               </a:rPr>
-              <a:t>阿特珠單抗加貝伐單抗（Atez+Bev）作為二線療法在杜瓦利單抗加特雷莫利單抗（Dur+Tre）後顯示出25.0%的客觀反應率（ORR）和75.0%的疾病控制率（DCR）。</a:t>
+              <a:t>阿特珠單抗加貝伐單抗（Atez+Bev）作為二線療法在接受過德瓦利單抗加特瑞利單抗（Dur+Tre）治療的患者中顯示出25.0%的客觀反應率（ORR）和75.0%的疾病控制率（DCR）。</a:t>
             </a:r>
             <a:endParaRPr lang="en-US" sz="1000" dirty="0"/>
           </a:p>
@@ -7530,7 +7530,7 @@
                 <a:ea typeface="Microsoft JhengHei" pitchFamily="34" charset="-122"/>
                 <a:cs typeface="Microsoft JhengHei" pitchFamily="34" charset="-120"/>
               </a:rPr>
-              <a:t>兩名對Dur+Tre無反應的患者在使用Atez+Bev後實現了腫瘤反應，顯示該亞組可能獲益。</a:t>
+              <a:t>兩名對Dur+Tre無反應的患者在接受Atez+Bev後達到了腫瘤反應，顯示出在先前治療患者中的潛在療效。</a:t>
             </a:r>
             <a:endParaRPr lang="en-US" sz="1000" dirty="0"/>
           </a:p>
@@ -7551,7 +7551,7 @@
                 <a:ea typeface="Microsoft JhengHei" pitchFamily="34" charset="-122"/>
                 <a:cs typeface="Microsoft JhengHei" pitchFamily="34" charset="-120"/>
               </a:rPr>
-              <a:t>常見的不良事件包括兩種方案均有的瘙癢，而Dur+Tre組更常見腸炎和腹瀉，Atez+Bev組則更常見蛋白尿、高氨血症和出血。</a:t>
+              <a:t>兩種方案的常見不良事件均包括瘙癢，而Dur+Tre組的結腸炎和腹瀉更為常見，Atez+Bev組則更常見蛋白尿、高氨血症和出血。</a:t>
             </a:r>
             <a:endParaRPr lang="en-US" sz="1000" dirty="0"/>
           </a:p>
@@ -7929,7 +7929,7 @@
                   <a:srgbClr val="1E1E1E"/>
                 </a:solidFill>
               </a:rPr>
-              <a:t>EN: The findings suggest that Atez+Bev can be an effective second-line treatment for HCC patients who do not respond to Dur+Tre, providing a new option for this challenging patient population. </a:t>
+              <a:t>EN: Atez+Bev may provide a beneficial treatment option for HCC patients who do not respond to prior immunotherapy with Dur+Tre. Clinicians should be aware of the differing safety profiles when considering sequential therapies. </a:t>
             </a:r>
             <a:endParaRPr lang="en-US" sz="1000" dirty="0"/>
           </a:p>
@@ -7946,7 +7946,7 @@
                   <a:srgbClr val="1E1E1E"/>
                 </a:solidFill>
               </a:rPr>
-              <a:t>ZH: 研究結果表明，Atez+Bev可以作為對Dur+Tre無反應的肝癌患者的有效二線治療，為這一挑戰性患者群體提供了新的選擇。</a:t>
+              <a:t>ZH: Atez+Bev可能為對先前Dur+Tre免疫治療無反應的肝癌患者提供有益的治療選擇。臨床醫生在考慮序貫治療時應注意不同的安全性特徵。</a:t>
             </a:r>
             <a:endParaRPr lang="en-US" sz="1000" dirty="0"/>
           </a:p>
@@ -8089,7 +8089,7 @@
                   <a:srgbClr val="1E1E1E"/>
                 </a:solidFill>
               </a:rPr>
-              <a:t>EN: Future studies should focus on larger cohorts to validate these findings and explore the underlying mechanisms that enhance the immune response after prior Dur+Tre therapy. </a:t>
+              <a:t>EN: Future studies should focus on larger cohorts to validate the efficacy of Atez+Bev following Dur+Tre and explore the underlying mechanisms enhancing immune response. Additionally, research into managing adverse events specific to each regimen will be essential. </a:t>
             </a:r>
             <a:endParaRPr lang="en-US" sz="1000" dirty="0"/>
           </a:p>
@@ -8106,7 +8106,7 @@
                   <a:srgbClr val="1E1E1E"/>
                 </a:solidFill>
               </a:rPr>
-              <a:t>ZH: 未來的研究應集中於更大樣本量的驗證這些發現，並探討在先前Dur+Tre治療後增強免疫反應的潛在機制。</a:t>
+              <a:t>ZH: 未來的研究應集中在更大規模的隊列上，以驗證Atez+Bev在Dur+Tre後的療效，並探討增強免疫反應的潛在機制。此外，針對每種方案特定的不良事件管理的研究將是必不可少的。</a:t>
             </a:r>
             <a:endParaRPr lang="en-US" sz="1000" dirty="0"/>
           </a:p>
@@ -8495,7 +8495,7 @@
                 <a:ea typeface="Arial" pitchFamily="34" charset="-122"/>
                 <a:cs typeface="Arial" pitchFamily="34" charset="-120"/>
               </a:rPr>
-              <a:t>The meta-analysis indicates that nutritional status may influence the efficacy of immunotherapy in HCC.</a:t>
+              <a:t>The study emphasizes the importance of nutritional status in the management of HCC during immunotherapy.</a:t>
             </a:r>
             <a:endParaRPr lang="en-US" sz="1000" dirty="0"/>
           </a:p>
@@ -8577,7 +8577,7 @@
                 <a:ea typeface="Microsoft JhengHei" pitchFamily="34" charset="-122"/>
                 <a:cs typeface="Microsoft JhengHei" pitchFamily="34" charset="-120"/>
               </a:rPr>
-              <a:t>預後營養指數（PNI）是接受免疫檢查點抑制劑的肝細胞癌患者生存的顯著預測因子。</a:t>
+              <a:t>預後營養指數（PNI）是接受免疫檢查點抑制劑的肝細胞癌患者生存的重要預測因子。</a:t>
             </a:r>
             <a:endParaRPr lang="en-US" sz="1000" dirty="0"/>
           </a:p>
@@ -8619,7 +8619,7 @@
                 <a:ea typeface="Microsoft JhengHei" pitchFamily="34" charset="-122"/>
                 <a:cs typeface="Microsoft JhengHei" pitchFamily="34" charset="-120"/>
               </a:rPr>
-              <a:t>這項綜合分析表明，營養狀態可能影響肝細胞癌免疫治療的療效。</a:t>
+              <a:t>該研究強調了在免疫療法期間管理肝細胞癌患者營養狀況的重要性。</a:t>
             </a:r>
             <a:endParaRPr lang="en-US" sz="1000" dirty="0"/>
           </a:p>
@@ -9882,7 +9882,24 @@
                   <a:srgbClr val="1E1E1E"/>
                 </a:solidFill>
               </a:rPr>
-              <a:t>EN: The prognostic nutritional index should be considered as a valuable tool for assessing the survival of HCC patients on immunotherapy. ZH: 預後營養指數應被視為評估接受免疫治療的肝細胞癌患者生存的重要工具。</a:t>
+              <a:t>EN: The findings suggest that monitoring and improving nutritional status may enhance treatment outcomes for HCC patients on ICIs. </a:t>
+            </a:r>
+            <a:endParaRPr lang="en-US" sz="1000" dirty="0"/>
+          </a:p>
+          <a:p>
+            <a:pPr indent="0" marL="0">
+              <a:lnSpc>
+                <a:spcPct val="140000"/>
+              </a:lnSpc>
+              <a:buNone/>
+            </a:pPr>
+            <a:r>
+              <a:rPr lang="en-US" sz="1000" dirty="0">
+                <a:solidFill>
+                  <a:srgbClr val="1E1E1E"/>
+                </a:solidFill>
+              </a:rPr>
+              <a:t>ZH: 研究結果表明，監測和改善營養狀況可能會提高接受免疫檢查點抑制劑的肝細胞癌患者的治療效果。</a:t>
             </a:r>
             <a:endParaRPr lang="en-US" sz="1000" dirty="0"/>
           </a:p>
@@ -10025,7 +10042,24 @@
                   <a:srgbClr val="1E1E1E"/>
                 </a:solidFill>
               </a:rPr>
-              <a:t>EN: Future research should focus on optimizing nutritional interventions to enhance the effectiveness of immune checkpoint inhibitors in HCC. ZH: 未來的研究應著重於優化營養干預，以提高肝細胞癌中免疫檢查點抑制劑的療效。</a:t>
+              <a:t>EN: Future research should explore the mechanisms linking nutritional status and immune response in HCC patients. </a:t>
+            </a:r>
+            <a:endParaRPr lang="en-US" sz="1000" dirty="0"/>
+          </a:p>
+          <a:p>
+            <a:pPr indent="0" marL="0">
+              <a:lnSpc>
+                <a:spcPct val="140000"/>
+              </a:lnSpc>
+              <a:buNone/>
+            </a:pPr>
+            <a:r>
+              <a:rPr lang="en-US" sz="1000" dirty="0">
+                <a:solidFill>
+                  <a:srgbClr val="1E1E1E"/>
+                </a:solidFill>
+              </a:rPr>
+              <a:t>ZH: 未來的研究應該探討營養狀況與肝細胞癌患者免疫反應之間的聯繫機制。</a:t>
             </a:r>
             <a:endParaRPr lang="en-US" sz="1000" dirty="0"/>
           </a:p>
@@ -10393,7 +10427,7 @@
                 <a:ea typeface="Arial" pitchFamily="34" charset="-122"/>
                 <a:cs typeface="Arial" pitchFamily="34" charset="-120"/>
               </a:rPr>
-              <a:t>External beam radiotherapy (EBRT) was compared to local ablation therapies, revealing differences in local progression-free survival.</a:t>
+              <a:t>External beam radiotherapy (EBRT) was compared to local ablation therapies, revealing differences in local progression-free survival rates.</a:t>
             </a:r>
             <a:endParaRPr lang="en-US" sz="1000" dirty="0"/>
           </a:p>
@@ -10414,7 +10448,7 @@
                 <a:ea typeface="Arial" pitchFamily="34" charset="-122"/>
                 <a:cs typeface="Arial" pitchFamily="34" charset="-120"/>
               </a:rPr>
-              <a:t>Meta-analysis indicates that local ablation may offer superior outcomes in specific patient populations with HCC.</a:t>
+              <a:t>The systematic review and meta-analysis indicate that local ablation may offer superior outcomes in specific patient populations.</a:t>
             </a:r>
             <a:endParaRPr lang="en-US" sz="1000" dirty="0"/>
           </a:p>
@@ -10517,7 +10551,7 @@
                 <a:ea typeface="Microsoft JhengHei" pitchFamily="34" charset="-122"/>
                 <a:cs typeface="Microsoft JhengHei" pitchFamily="34" charset="-120"/>
               </a:rPr>
-              <a:t>外部放射治療（EBRT）與局部消融療法進行比較，顯示在局部無進展生存期方面存在差異。</a:t>
+              <a:t>外部放射治療（EBRT）與局部消融療法進行比較，顯示局部無進展生存率存在差異。</a:t>
             </a:r>
             <a:endParaRPr lang="en-US" sz="1000" dirty="0"/>
           </a:p>
@@ -10538,7 +10572,7 @@
                 <a:ea typeface="Microsoft JhengHei" pitchFamily="34" charset="-122"/>
                 <a:cs typeface="Microsoft JhengHei" pitchFamily="34" charset="-120"/>
               </a:rPr>
-              <a:t>元分析表明，在特定的HCC患者群體中，局部消融可能提供更好的療效。</a:t>
+              <a:t>系統評價和荟萃分析表明，局部消融在特定患者群體中可能提供更優的療效。</a:t>
             </a:r>
             <a:endParaRPr lang="en-US" sz="1000" dirty="0"/>
           </a:p>
@@ -10871,7 +10905,7 @@
                   <a:srgbClr val="1E1E1E"/>
                 </a:solidFill>
               </a:rPr>
-              <a:t>EN: The findings suggest that local ablation therapies may be preferred for HCC treatment due to their effectiveness in improving local progression-free survival. </a:t>
+              <a:t>EN: The findings suggest that local ablation therapies may be preferred for certain HCC patients due to better local progression-free survival. </a:t>
             </a:r>
             <a:endParaRPr lang="en-US" sz="1000" dirty="0"/>
           </a:p>
@@ -10888,7 +10922,7 @@
                   <a:srgbClr val="1E1E1E"/>
                 </a:solidFill>
               </a:rPr>
-              <a:t>ZH: 研究結果表明，局部消融療法可能因其在改善局部無進展生存期方面的有效性而成為HCC治療的首選。</a:t>
+              <a:t>ZH: 研究結果表明，對於某些HCC患者，局部消融療法可能因更好的局部無進展生存率而更受青睞。</a:t>
             </a:r>
             <a:endParaRPr lang="en-US" sz="1000" dirty="0"/>
           </a:p>
@@ -11031,7 +11065,7 @@
                   <a:srgbClr val="1E1E1E"/>
                 </a:solidFill>
               </a:rPr>
-              <a:t>EN: Future research should focus on identifying specific patient populations that benefit most from local ablation versus EBRT. </a:t>
+              <a:t>EN: Future studies should focus on identifying specific patient characteristics that predict better outcomes with local ablation versus EBRT. </a:t>
             </a:r>
             <a:endParaRPr lang="en-US" sz="1000" dirty="0"/>
           </a:p>
@@ -11048,7 +11082,7 @@
                   <a:srgbClr val="1E1E1E"/>
                 </a:solidFill>
               </a:rPr>
-              <a:t>ZH: 未來的研究應集中於確定哪些特定患者群體最能從局部消融療法與EBRT中受益。</a:t>
+              <a:t>ZH: 未來的研究應著重於識別預測局部消融相較於EBRT能獲得更好療效的特定患者特徵。</a:t>
             </a:r>
             <a:endParaRPr lang="en-US" sz="1000" dirty="0"/>
           </a:p>
@@ -11316,7 +11350,7 @@
                   <a:srgbClr val="F5F5F5"/>
                 </a:solidFill>
               </a:rPr>
-              <a:t>1. **免疫治療的潛力**  </a:t>
+              <a:t>1. **腫瘤微環境的重塑 (Remodeling of Tumor Microenvironment)**  </a:t>
             </a:r>
             <a:endParaRPr lang="en-US" sz="1000" dirty="0"/>
           </a:p>
@@ -11333,7 +11367,7 @@
                   <a:srgbClr val="F5F5F5"/>
                 </a:solidFill>
               </a:rPr>
-              <a:t>   The integration of immune therapies, such as PD-1 inhibitors, has shown promising results in enhancing treatment responses in hepatocellular carcinoma (HCC), particularly when combined with other modalities like radiotherapy or local ablation.  </a:t>
+              <a:t>   免疫治療與局部消融的聯合應用能有效重塑肝細胞癌的腫瘤微環境，提升治療效果。  </a:t>
             </a:r>
             <a:endParaRPr lang="en-US" sz="1000" dirty="0"/>
           </a:p>
@@ -11350,7 +11384,7 @@
                   <a:srgbClr val="F5F5F5"/>
                 </a:solidFill>
               </a:rPr>
-              <a:t>   免疫治療（如PD-1抑制劑）的整合顯示出在肝細胞癌（HCC）中增強治療反應的潛力，特別是與其他療法（如放射治療或局部消融）聯合使用時。</a:t>
+              <a:t>   The combination of immune therapy and local ablation can effectively remodel the tumor microenvironment in hepatocellular carcinoma, enhancing treatment efficacy.</a:t>
             </a:r>
             <a:endParaRPr lang="en-US" sz="1000" dirty="0"/>
           </a:p>
@@ -11376,7 +11410,7 @@
                   <a:srgbClr val="F5F5F5"/>
                 </a:solidFill>
               </a:rPr>
-              <a:t>2. **腫瘤微環境的重塑**  </a:t>
+              <a:t>2. **癌症相關成纖維細胞的角色 (Role of Cancer-Associated Fibroblasts)**  </a:t>
             </a:r>
             <a:endParaRPr lang="en-US" sz="1000" dirty="0"/>
           </a:p>
@@ -11393,7 +11427,7 @@
                   <a:srgbClr val="F5F5F5"/>
                 </a:solidFill>
               </a:rPr>
-              <a:t>   Neoadjuvant therapies, including stereotactic body radiation therapy combined with immune therapy, can favorably remodel the tumor microenvironment, potentially improving outcomes in early-stage HCC.  </a:t>
+              <a:t>   癌症相關成纖維細胞在肝細胞癌中促進免疫抑制，透過NNMT-ANGPTL4軸影響腫瘤進展。  </a:t>
             </a:r>
             <a:endParaRPr lang="en-US" sz="1000" dirty="0"/>
           </a:p>
@@ -11410,7 +11444,7 @@
                   <a:srgbClr val="F5F5F5"/>
                 </a:solidFill>
               </a:rPr>
-              <a:t>   新輔助療法，包括立體定位體放射治療與免疫療法的結合，能夠有利於重塑腫瘤微環境，可能改善早期HCC的治療結果。</a:t>
+              <a:t>   Cancer-associated fibroblasts promote immunosuppression in hepatocellular carcinoma through the NNMT-ANGPTL4 axis, influencing tumor progression.</a:t>
             </a:r>
             <a:endParaRPr lang="en-US" sz="1000" dirty="0"/>
           </a:p>
@@ -11436,7 +11470,7 @@
                   <a:srgbClr val="F5F5F5"/>
                 </a:solidFill>
               </a:rPr>
-              <a:t>3. **癌症相關成纖維細胞的角色**  </a:t>
+              <a:t>3. **術後復發的挑戰 (Challenges of Postoperative Recurrence)**  </a:t>
             </a:r>
             <a:endParaRPr lang="en-US" sz="1000" dirty="0"/>
           </a:p>
@@ -11453,7 +11487,7 @@
                   <a:srgbClr val="F5F5F5"/>
                 </a:solidFill>
               </a:rPr>
-              <a:t>   Cancer-associated fibroblasts (CAFs) play a significant role in tumor immunosuppression in HCC, indicating that targeting metabolic pathways in CAFs may provide new therapeutic strategies.  </a:t>
+              <a:t>   雖然外科切除對早期肝細胞癌有效，但術後復發仍是主要臨床挑戰，需深入探討其機制。  </a:t>
             </a:r>
             <a:endParaRPr lang="en-US" sz="1000" dirty="0"/>
           </a:p>
@@ -11470,7 +11504,7 @@
                   <a:srgbClr val="F5F5F5"/>
                 </a:solidFill>
               </a:rPr>
-              <a:t>   癌症相關成纖維細胞（CAFs）在HCC中的腫瘤免疫抑制中扮演重要角色，這表明針對CAFs的代謝途徑可能提供新的治療策略。</a:t>
+              <a:t>   While surgical resection is effective for early-stage hepatocellular carcinoma, postoperative recurrence remains a major clinical challenge, necessitating deeper exploration of its mechanisms.</a:t>
             </a:r>
             <a:endParaRPr lang="en-US" sz="1000" dirty="0"/>
           </a:p>
@@ -11496,7 +11530,7 @@
                   <a:srgbClr val="F5F5F5"/>
                 </a:solidFill>
               </a:rPr>
-              <a:t>4. **術後復發的挑戰**  </a:t>
+              <a:t>4. **免疫檢查點抑制劑的應用 (Application of Immune Checkpoint Inhibitors)**  </a:t>
             </a:r>
             <a:endParaRPr lang="en-US" sz="1000" dirty="0"/>
           </a:p>
@@ -11513,7 +11547,7 @@
                   <a:srgbClr val="F5F5F5"/>
                 </a:solidFill>
               </a:rPr>
-              <a:t>   Despite effective surgical interventions, postoperative recurrence remains a critical challenge in HCC management, underscoring the need for better understanding of relapse mechanisms and potential therapeutic targets.  </a:t>
+              <a:t>   免疫檢查點抑制劑在肝細胞癌中的應用顯示出良好的療效，但在不同階段的最佳使用策略尚不明確。  </a:t>
             </a:r>
             <a:endParaRPr lang="en-US" sz="1000" dirty="0"/>
           </a:p>
@@ -11530,7 +11564,7 @@
                   <a:srgbClr val="F5F5F5"/>
                 </a:solidFill>
               </a:rPr>
-              <a:t>   儘管手術干預有效，術後復發仍然是HCC管理中的一個關鍵挑戰，強調了對復發機制和潛在治療靶點的更好理解的必要性。</a:t>
+              <a:t>   The application of immune checkpoint inhibitors in hepatocellular carcinoma shows promising efficacy, but optimal usage strategies across different stages remain unclear.</a:t>
             </a:r>
             <a:endParaRPr lang="en-US" sz="1000" dirty="0"/>
           </a:p>
@@ -11556,7 +11590,7 @@
                   <a:srgbClr val="F5F5F5"/>
                 </a:solidFill>
               </a:rPr>
-              <a:t>5. **營養狀態與預後的關聯**  </a:t>
+              <a:t>5. **營養指數與預後的關聯 (Association of Nutritional Index with Prognosis)**  </a:t>
             </a:r>
             <a:endParaRPr lang="en-US" sz="1000" dirty="0"/>
           </a:p>
@@ -11573,7 +11607,7 @@
                   <a:srgbClr val="F5F5F5"/>
                 </a:solidFill>
               </a:rPr>
-              <a:t>   The prognostic nutritional index has been identified as a potential predictor of survival in HCC patients undergoing immune checkpoint inhibitor therapy, highlighting the importance of nutritional status in treatment outcomes.  </a:t>
+              <a:t>   預後營養指數可能與接受免疫檢查點抑制劑的肝細胞癌患者的生存率相關，提示營養狀態的重要性。  </a:t>
             </a:r>
             <a:endParaRPr lang="en-US" sz="1000" dirty="0"/>
           </a:p>
@@ -11590,7 +11624,7 @@
                   <a:srgbClr val="F5F5F5"/>
                 </a:solidFill>
               </a:rPr>
-              <a:t>   預後營養指數被認為是接受免疫檢查點抑制劑治療的HCC患者生存的潛在預測因子，突顯了營養狀態在治療結果中的重要性。</a:t>
+              <a:t>   The prognostic nutritional index may be associated with survival in hepatocellular carcinoma patients treated with immune checkpoint inhibitors, highlighting the importance of nutritional status.</a:t>
             </a:r>
             <a:endParaRPr lang="en-US" sz="1000" dirty="0"/>
           </a:p>
@@ -11642,7 +11676,7 @@
                   <a:srgbClr val="F5F5F5"/>
                 </a:solidFill>
               </a:rPr>
-              <a:t>1. **早期階段的免疫治療策略**  </a:t>
+              <a:t>1. **早期階段免疫治療的最佳化 (Optimization of Immune Therapy in Early Stages)**  </a:t>
             </a:r>
             <a:endParaRPr lang="en-US" sz="1000" dirty="0"/>
           </a:p>
@@ -11659,7 +11693,7 @@
                   <a:srgbClr val="F5F5F5"/>
                 </a:solidFill>
               </a:rPr>
-              <a:t>   Future studies should focus on defining optimal immune therapy regimens for early-stage HCC to maximize treatment efficacy and minimize recurrence rates.  </a:t>
+              <a:t>   需進一步研究免疫治療在早期肝細胞癌中的最佳使用時機與方案，以提高治療效果。  </a:t>
             </a:r>
             <a:endParaRPr lang="en-US" sz="1000" dirty="0"/>
           </a:p>
@@ -11676,7 +11710,7 @@
                   <a:srgbClr val="F5F5F5"/>
                 </a:solidFill>
               </a:rPr>
-              <a:t>   未來的研究應集中於確定早期HCC的最佳免疫治療方案，以最大化治療效果並最小化復發率。</a:t>
+              <a:t>   Further research is needed to optimize the timing and regimens of immune therapy in early-stage hepatocellular carcinoma to improve treatment outcomes.</a:t>
             </a:r>
             <a:endParaRPr lang="en-US" sz="1000" dirty="0"/>
           </a:p>
@@ -11702,7 +11736,7 @@
                   <a:srgbClr val="F5F5F5"/>
                 </a:solidFill>
               </a:rPr>
-              <a:t>2. **CAFs的代謝調控研究**  </a:t>
+              <a:t>2. **癌症相關成纖維細胞的靶向治療 (Targeted Therapies Against Cancer-Associated Fibroblasts)**  </a:t>
             </a:r>
             <a:endParaRPr lang="en-US" sz="1000" dirty="0"/>
           </a:p>
@@ -11719,7 +11753,7 @@
                   <a:srgbClr val="F5F5F5"/>
                 </a:solidFill>
               </a:rPr>
-              <a:t>   Investigating the metabolic regulation of cancer-associated fibroblasts (CAFs) may uncover new therapeutic targets that could enhance the efficacy of existing treatments.  </a:t>
+              <a:t>   探索針對癌症相關成纖維細胞的靶向治療，可能成為改善肝細胞癌患者預後的新策略。  </a:t>
             </a:r>
             <a:endParaRPr lang="en-US" sz="1000" dirty="0"/>
           </a:p>
@@ -11736,7 +11770,7 @@
                   <a:srgbClr val="F5F5F5"/>
                 </a:solidFill>
               </a:rPr>
-              <a:t>   研究癌症相關成纖維細胞（CAFs）的代謝調控可能會揭示新的治療靶點，從而提高現有治療的療效。</a:t>
+              <a:t>   Investigating targeted therapies against cancer-associated fibroblasts may become a novel strategy for improving prognosis in hepatocellular carcinoma patients.</a:t>
             </a:r>
             <a:endParaRPr lang="en-US" sz="1000" dirty="0"/>
           </a:p>
@@ -11762,7 +11796,7 @@
                   <a:srgbClr val="F5F5F5"/>
                 </a:solidFill>
               </a:rPr>
-              <a:t>3. **術後監測與干預**  </a:t>
+              <a:t>3. **術後管理與復發預防 (Postoperative Management and Recurrence Prevention)**  </a:t>
             </a:r>
             <a:endParaRPr lang="en-US" sz="1000" dirty="0"/>
           </a:p>
@@ -11779,7 +11813,7 @@
                   <a:srgbClr val="F5F5F5"/>
                 </a:solidFill>
               </a:rPr>
-              <a:t>   Developing strategies for postoperative monitoring and intervention could help address the high recurrence rates seen in HCC patients after surgical resection.  </a:t>
+              <a:t>   需開展研究以制定有效的術後管理方案，降低肝細胞癌的復發率，提高患者生存率。  </a:t>
             </a:r>
             <a:endParaRPr lang="en-US" sz="1000" dirty="0"/>
           </a:p>
@@ -11796,7 +11830,7 @@
                   <a:srgbClr val="F5F5F5"/>
                 </a:solidFill>
               </a:rPr>
-              <a:t>   開發術後監測和干預策略可以幫助解決HCC患者在手術切除後出現的高復發率問題。</a:t>
+              <a:t>   Research should focus on developing effective postoperative management strategies to reduce recurrence rates in hepatocellular carcinoma and improve patient survival.</a:t>
             </a:r>
             <a:endParaRPr lang="en-US" sz="1000" dirty="0"/>
           </a:p>
@@ -11822,7 +11856,7 @@
                   <a:srgbClr val="F5F5F5"/>
                 </a:solidFill>
               </a:rPr>
-              <a:t>4. **多模態療法的臨床試驗**  </a:t>
+              <a:t>4. **免疫治療與其他療法的聯合使用 (Combination of Immune Therapy with Other Treatments)**  </a:t>
             </a:r>
             <a:endParaRPr lang="en-US" sz="1000" dirty="0"/>
           </a:p>
@@ -11839,7 +11873,7 @@
                   <a:srgbClr val="F5F5F5"/>
                 </a:solidFill>
               </a:rPr>
-              <a:t>   Conducting clinical trials that explore the combination of multiple modalities, including immunotherapy, local ablation, and systemic therapies, could lead to improved outcomes for advanced HCC patients.  </a:t>
+              <a:t>   探討免疫治療與其他治療方法（如局部消融、化療）的聯合使用，以增強療效。  </a:t>
             </a:r>
             <a:endParaRPr lang="en-US" sz="1000" dirty="0"/>
           </a:p>
@@ -11856,7 +11890,7 @@
                   <a:srgbClr val="F5F5F5"/>
                 </a:solidFill>
               </a:rPr>
-              <a:t>   開展探索多種療法組合（包括免疫療法、局部消融和全身療法）的臨床試驗，可能會為晚期HCC患者帶來更好的治療結果。</a:t>
+              <a:t>   Investigating the combination of immune therapy with other treatment modalities (such as local ablation and chemotherapy) to enhance efficacy.</a:t>
             </a:r>
             <a:endParaRPr lang="en-US" sz="1000" dirty="0"/>
           </a:p>
@@ -11882,7 +11916,7 @@
                   <a:srgbClr val="F5F5F5"/>
                 </a:solidFill>
               </a:rPr>
-              <a:t>5. **營養干預的臨床應用**  </a:t>
+              <a:t>5. **生物標記物的發現與應用 (Discovery and Application of Biomarkers)**  </a:t>
             </a:r>
             <a:endParaRPr lang="en-US" sz="1000" dirty="0"/>
           </a:p>
@@ -11899,7 +11933,7 @@
                   <a:srgbClr val="F5F5F5"/>
                 </a:solidFill>
               </a:rPr>
-              <a:t>   Future research should investigate the role of nutritional interventions in conjunction with immune therapies to enhance patient outcomes in HCC.  </a:t>
+              <a:t>   研究生物標記物的潛力，以預測肝細胞癌患者對免疫治療的反應，從而個性化治療。  </a:t>
             </a:r>
             <a:endParaRPr lang="en-US" sz="1000" dirty="0"/>
           </a:p>
@@ -11916,7 +11950,7 @@
                   <a:srgbClr val="F5F5F5"/>
                 </a:solidFill>
               </a:rPr>
-              <a:t>   未來的研究應探討營養干預與免疫療法結合的作用，以提高HCC患者的治療結果。</a:t>
+              <a:t>   Researching the potential of biomarkers to predict responses to immune therapy in hepatocellular carcinoma patients, allowing for personalized treatment approaches.</a:t>
             </a:r>
             <a:endParaRPr lang="en-US" sz="1000" dirty="0"/>
           </a:p>
@@ -12486,7 +12520,7 @@
                 <a:ea typeface="Arial" pitchFamily="34" charset="-122"/>
                 <a:cs typeface="Arial" pitchFamily="34" charset="-120"/>
               </a:rPr>
-              <a:t>The hallmarks of cancer framework has significantly influenced the treatment of primary liver cancer, particularly hepatocellular carcinoma (HCC) and intrahepatic cholangiocarcinoma (iCCA).</a:t>
+              <a:t>The hallmarks of cancer provide a framework for understanding liver cancer, particularly HCC and iCCA.</a:t>
             </a:r>
             <a:endParaRPr lang="en-US" sz="1000" dirty="0"/>
           </a:p>
@@ -12507,7 +12541,7 @@
                 <a:ea typeface="Arial" pitchFamily="34" charset="-122"/>
                 <a:cs typeface="Arial" pitchFamily="34" charset="-120"/>
               </a:rPr>
-              <a:t>Key hallmarks of HCC include sustaining proliferative signaling, inducing vasculature, and avoiding immune detection.</a:t>
+              <a:t>HCC exhibits key hallmarks such as sustaining proliferative signaling, inducing vasculature, and avoiding immune detection.</a:t>
             </a:r>
             <a:endParaRPr lang="en-US" sz="1000" dirty="0"/>
           </a:p>
@@ -12528,7 +12562,7 @@
                 <a:ea typeface="Arial" pitchFamily="34" charset="-122"/>
                 <a:cs typeface="Arial" pitchFamily="34" charset="-120"/>
               </a:rPr>
-              <a:t>Immunotherapies have led to significant improvements in outcomes for patients with advanced HCC over the past two decades.</a:t>
+              <a:t>Immunotherapies have significantly improved outcomes for patients with advanced HCC over the past two decades.</a:t>
             </a:r>
             <a:endParaRPr lang="en-US" sz="1000" dirty="0"/>
           </a:p>
@@ -12549,7 +12583,7 @@
                 <a:ea typeface="Arial" pitchFamily="34" charset="-122"/>
                 <a:cs typeface="Arial" pitchFamily="34" charset="-120"/>
               </a:rPr>
-              <a:t>iCCA exhibits hallmarks such as deregulating cellular metabolism and also avoiding immune detection, with 45% of cases having targetable alterations for precision oncology.</a:t>
+              <a:t>iCCA shows hallmarks like deregulating cellular metabolism and has specific alterations suitable for precision oncology.</a:t>
             </a:r>
             <a:endParaRPr lang="en-US" sz="1000" dirty="0"/>
           </a:p>
@@ -12570,7 +12604,7 @@
                 <a:ea typeface="Arial" pitchFamily="34" charset="-122"/>
                 <a:cs typeface="Arial" pitchFamily="34" charset="-120"/>
               </a:rPr>
-              <a:t>The review discusses breakthroughs in liver cancer management and emerging therapeutic strategies.</a:t>
+              <a:t>Emerging therapeutic strategies are being developed to enhance liver cancer management based on these hallmarks.</a:t>
             </a:r>
             <a:endParaRPr lang="en-US" sz="1000" dirty="0"/>
           </a:p>
@@ -12652,7 +12686,7 @@
                 <a:ea typeface="Microsoft JhengHei" pitchFamily="34" charset="-122"/>
                 <a:cs typeface="Microsoft JhengHei" pitchFamily="34" charset="-120"/>
               </a:rPr>
-              <a:t>癌症的標誌框架對原發性肝癌的治療產生了重大影響，特別是肝細胞癌（HCC）和肝內膽管癌（iCCA）。</a:t>
+              <a:t>癌症的特徵為理解肝癌，尤其是HCC和iCCA，提供了框架。</a:t>
             </a:r>
             <a:endParaRPr lang="en-US" sz="1000" dirty="0"/>
           </a:p>
@@ -12673,7 +12707,7 @@
                 <a:ea typeface="Microsoft JhengHei" pitchFamily="34" charset="-122"/>
                 <a:cs typeface="Microsoft JhengHei" pitchFamily="34" charset="-120"/>
               </a:rPr>
-              <a:t>HCC的主要標誌包括持續增殖信號、誘導血管生成和避免免疫檢測。</a:t>
+              <a:t>HCC的主要特徵包括持續增殖信號、誘導血管形成和避免免疫檢測。</a:t>
             </a:r>
             <a:endParaRPr lang="en-US" sz="1000" dirty="0"/>
           </a:p>
@@ -12694,7 +12728,7 @@
                 <a:ea typeface="Microsoft JhengHei" pitchFamily="34" charset="-122"/>
                 <a:cs typeface="Microsoft JhengHei" pitchFamily="34" charset="-120"/>
               </a:rPr>
-              <a:t>在過去的二十年中，免疫療法顯著改善了晚期HCC患者的預後。</a:t>
+              <a:t>在過去二十年中，免疫治療顯著改善了晚期HCC患者的預後。</a:t>
             </a:r>
             <a:endParaRPr lang="en-US" sz="1000" dirty="0"/>
           </a:p>
@@ -12715,7 +12749,7 @@
                 <a:ea typeface="Microsoft JhengHei" pitchFamily="34" charset="-122"/>
                 <a:cs typeface="Microsoft JhengHei" pitchFamily="34" charset="-120"/>
               </a:rPr>
-              <a:t>iCCA的標誌包括去調節細胞代謝，同樣避免免疫檢測，約45%的病例具有可針對的精準醫療改變。</a:t>
+              <a:t>iCCA顯示出如去調節細胞代謝等特徵，並具有適合精準醫療的特定變化。</a:t>
             </a:r>
             <a:endParaRPr lang="en-US" sz="1000" dirty="0"/>
           </a:p>
@@ -12736,7 +12770,7 @@
                 <a:ea typeface="Microsoft JhengHei" pitchFamily="34" charset="-122"/>
                 <a:cs typeface="Microsoft JhengHei" pitchFamily="34" charset="-120"/>
               </a:rPr>
-              <a:t>該評論探討了肝癌管理的突破和新興的治療策略。</a:t>
+              <a:t>基於這些特徵，正在開發新興的治療策略以增強肝癌管理。</a:t>
             </a:r>
             <a:endParaRPr lang="en-US" sz="1000" dirty="0"/>
           </a:p>
@@ -13114,7 +13148,7 @@
                   <a:srgbClr val="1E1E1E"/>
                 </a:solidFill>
               </a:rPr>
-              <a:t>EN: The application of the cancer hallmarks framework has led to improved treatment strategies for HCC, particularly through the use of immunotherapies. </a:t>
+              <a:t>EN: The identification of key hallmarks in liver cancer has led to improved therapeutic strategies, particularly with the advent of immunotherapies for HCC. </a:t>
             </a:r>
             <a:endParaRPr lang="en-US" sz="1000" dirty="0"/>
           </a:p>
@@ -13131,7 +13165,7 @@
                   <a:srgbClr val="1E1E1E"/>
                 </a:solidFill>
               </a:rPr>
-              <a:t>ZH: 癌症標誌框架的應用促進了HCC的治療策略改進，特別是通過免疫療法的使用。</a:t>
+              <a:t>ZH: 肝癌關鍵特徵的識別促進了治療策略的改善，特別是HCC的免疫治療的出現。</a:t>
             </a:r>
             <a:endParaRPr lang="en-US" sz="1000" dirty="0"/>
           </a:p>
@@ -13274,7 +13308,7 @@
                   <a:srgbClr val="1E1E1E"/>
                 </a:solidFill>
               </a:rPr>
-              <a:t>EN: Future research should focus on identifying additional therapeutic targets in iCCA and optimizing immunotherapy combinations for HCC. </a:t>
+              <a:t>EN: Future research should focus on further elucidating the molecular mechanisms underlying these hallmarks to develop targeted therapies. </a:t>
             </a:r>
             <a:endParaRPr lang="en-US" sz="1000" dirty="0"/>
           </a:p>
@@ -13291,7 +13325,7 @@
                   <a:srgbClr val="1E1E1E"/>
                 </a:solidFill>
               </a:rPr>
-              <a:t>ZH: 未來的研究應集中於識別iCCA中的額外治療靶點，以及優化HCC的免疫療法組合。</a:t>
+              <a:t>ZH: 未來的研究應集中於進一步闡明這些特徵背後的分子機制，以開發靶向療法。</a:t>
             </a:r>
             <a:endParaRPr lang="en-US" sz="1000" dirty="0"/>
           </a:p>
@@ -13659,7 +13693,7 @@
                 <a:ea typeface="Arial" pitchFamily="34" charset="-122"/>
                 <a:cs typeface="Arial" pitchFamily="34" charset="-120"/>
               </a:rPr>
-              <a:t>Only one patient experienced a grade 3 treatment-related adverse event, indicating a favorable safety profile.</a:t>
+              <a:t>Only one patient experienced a grade 3 treatment-related adverse event, demonstrating a favorable safety profile.</a:t>
             </a:r>
             <a:endParaRPr lang="en-US" sz="1000" dirty="0"/>
           </a:p>
@@ -13680,7 +13714,7 @@
                 <a:ea typeface="Arial" pitchFamily="34" charset="-122"/>
                 <a:cs typeface="Arial" pitchFamily="34" charset="-120"/>
               </a:rPr>
-              <a:t>All resected patients achieved margin-negative (R0) resection, and one patient had a pathologic complete response.</a:t>
+              <a:t>All patients who underwent surgery achieved margin-negative (R0) resection, with one patient achieving a pathologic complete response.</a:t>
             </a:r>
             <a:endParaRPr lang="en-US" sz="1000" dirty="0"/>
           </a:p>
@@ -13701,7 +13735,7 @@
                 <a:ea typeface="Arial" pitchFamily="34" charset="-122"/>
                 <a:cs typeface="Arial" pitchFamily="34" charset="-120"/>
               </a:rPr>
-              <a:t>Post-treatment specimens showed significantly increased anti-cancer immune infiltration compared to treatment-naïve HCC specimens.</a:t>
+              <a:t>Post-treatment tumor specimens exhibited significantly increased anti-cancer immune infiltration compared to treatment-naïve specimens.</a:t>
             </a:r>
             <a:endParaRPr lang="en-US" sz="1000" dirty="0"/>
           </a:p>
@@ -13722,7 +13756,7 @@
                 <a:ea typeface="Arial" pitchFamily="34" charset="-122"/>
                 <a:cs typeface="Arial" pitchFamily="34" charset="-120"/>
               </a:rPr>
-              <a:t>The study highlights the potential of neoadjuvant SBRT and immune therapy to remodel the tumor microenvironment favorably.</a:t>
+              <a:t>The level of immune infiltration correlated with pre-operative radiographic response, indicating potential predictive value.</a:t>
             </a:r>
             <a:endParaRPr lang="en-US" sz="1000" dirty="0"/>
           </a:p>
@@ -13846,7 +13880,7 @@
                 <a:ea typeface="Microsoft JhengHei" pitchFamily="34" charset="-122"/>
                 <a:cs typeface="Microsoft JhengHei" pitchFamily="34" charset="-120"/>
               </a:rPr>
-              <a:t>所有切除的患者均達到邊緣陰性（R0）切除，且一名患者達到病理完全緩解。</a:t>
+              <a:t>所有接受手術的患者均達到邊緣陰性（R0）切除，其中一名患者達到病理完全緩解。</a:t>
             </a:r>
             <a:endParaRPr lang="en-US" sz="1000" dirty="0"/>
           </a:p>
@@ -13867,7 +13901,7 @@
                 <a:ea typeface="Microsoft JhengHei" pitchFamily="34" charset="-122"/>
                 <a:cs typeface="Microsoft JhengHei" pitchFamily="34" charset="-120"/>
               </a:rPr>
-              <a:t>與未治療的HCC標本相比，治療後標本顯示顯著增加的抗癌免疫浸潤。</a:t>
+              <a:t>與未治療的腫瘤樣本相比，治療後的腫瘤樣本顯示出顯著增加的抗癌免疫浸潤。</a:t>
             </a:r>
             <a:endParaRPr lang="en-US" sz="1000" dirty="0"/>
           </a:p>
@@ -13888,7 +13922,7 @@
                 <a:ea typeface="Microsoft JhengHei" pitchFamily="34" charset="-122"/>
                 <a:cs typeface="Microsoft JhengHei" pitchFamily="34" charset="-120"/>
               </a:rPr>
-              <a:t>該研究強調了新輔助SBRT和免疫治療有潛力有利於重塑腫瘤微環境。</a:t>
+              <a:t>免疫浸潤的程度與術前影像學反應相關，顯示出潛在的預測價值。</a:t>
             </a:r>
             <a:endParaRPr lang="en-US" sz="1000" dirty="0"/>
           </a:p>
@@ -14266,7 +14300,7 @@
                   <a:srgbClr val="1E1E1E"/>
                 </a:solidFill>
               </a:rPr>
-              <a:t>EN: This study demonstrates that combining neoadjuvant SBRT with immune therapy is a promising approach for patients with resectable HCC, showing a favorable safety profile and effective tumor response. </a:t>
+              <a:t>EN: This study highlights the potential of combining neoadjuvant SBRT with immune therapy to enhance treatment outcomes in HCC patients. </a:t>
             </a:r>
             <a:endParaRPr lang="en-US" sz="1000" dirty="0"/>
           </a:p>
@@ -14283,7 +14317,7 @@
                   <a:srgbClr val="1E1E1E"/>
                 </a:solidFill>
               </a:rPr>
-              <a:t>ZH: 本研究表明，將新輔助SBRT與免疫治療結合對於可切除HCC患者是一種有前景的方法，顯示出良好的安全性和有效的腫瘤反應。</a:t>
+              <a:t>ZH: 本研究突顯了將新輔助SBRT與免疫治療結合的潛力，以改善HCC患者的治療結果。</a:t>
             </a:r>
             <a:endParaRPr lang="en-US" sz="1000" dirty="0"/>
           </a:p>
@@ -14426,7 +14460,7 @@
                   <a:srgbClr val="1E1E1E"/>
                 </a:solidFill>
               </a:rPr>
-              <a:t>EN: Future studies should focus on larger, multi-institutional trials to validate these findings and explore the optimal timing and sequencing of SBRT and immune therapy. </a:t>
+              <a:t>EN: Future studies should focus on larger cohorts to validate these findings and explore the mechanisms underlying immune remodeling. </a:t>
             </a:r>
             <a:endParaRPr lang="en-US" sz="1000" dirty="0"/>
           </a:p>
@@ -14443,7 +14477,7 @@
                   <a:srgbClr val="1E1E1E"/>
                 </a:solidFill>
               </a:rPr>
-              <a:t>ZH: 未來的研究應集中於更大規模的多機構試驗，以驗證這些發現並探索SBRT和免疫治療的最佳時機和順序。</a:t>
+              <a:t>ZH: 未來的研究應集中於更大樣本量以驗證這些發現，並探討免疫重塑的機制。</a:t>
             </a:r>
             <a:endParaRPr lang="en-US" sz="1000" dirty="0"/>
           </a:p>
@@ -14790,7 +14824,7 @@
                 <a:ea typeface="Arial" pitchFamily="34" charset="-122"/>
                 <a:cs typeface="Arial" pitchFamily="34" charset="-120"/>
               </a:rPr>
-              <a:t>Hepatectomy modifies the effectiveness of adjuvant anti-PD-1 therapy in a mouse model of HCC.</a:t>
+              <a:t>Hepatectomy changes the effectiveness of adjuvant anti-PD-1 therapy in mouse models of HCC.</a:t>
             </a:r>
             <a:endParaRPr lang="en-US" sz="1000" dirty="0"/>
           </a:p>
@@ -14811,7 +14845,7 @@
                 <a:ea typeface="Arial" pitchFamily="34" charset="-122"/>
                 <a:cs typeface="Arial" pitchFamily="34" charset="-120"/>
               </a:rPr>
-              <a:t>The study indicates that neoadjuvant anti-PD-1 treatment remains effective despite prior hepatectomy.</a:t>
+              <a:t>Neoadjuvant anti-PD-1 therapy remains effective even after hepatectomy.</a:t>
             </a:r>
             <a:endParaRPr lang="en-US" sz="1000" dirty="0"/>
           </a:p>
@@ -14832,7 +14866,7 @@
                 <a:ea typeface="Arial" pitchFamily="34" charset="-122"/>
                 <a:cs typeface="Arial" pitchFamily="34" charset="-120"/>
               </a:rPr>
-              <a:t>These findings suggest a complex interaction between surgical intervention and immunotherapy in HCC management.</a:t>
+              <a:t>The study highlights the need to consider surgical interventions when evaluating immunotherapy outcomes.</a:t>
             </a:r>
             <a:endParaRPr lang="en-US" sz="1000" dirty="0"/>
           </a:p>
@@ -14935,7 +14969,7 @@
                 <a:ea typeface="Microsoft JhengHei" pitchFamily="34" charset="-122"/>
                 <a:cs typeface="Microsoft JhengHei" pitchFamily="34" charset="-120"/>
               </a:rPr>
-              <a:t>研究表明，儘管進行了肝切除術，術前抗PD-1治療仍然有效。</a:t>
+              <a:t>即使在肝切除後，術前抗PD-1療法仍然有效。</a:t>
             </a:r>
             <a:endParaRPr lang="en-US" sz="1000" dirty="0"/>
           </a:p>
@@ -14956,7 +14990,7 @@
                 <a:ea typeface="Microsoft JhengHei" pitchFamily="34" charset="-122"/>
                 <a:cs typeface="Microsoft JhengHei" pitchFamily="34" charset="-120"/>
               </a:rPr>
-              <a:t>這些發現暗示了手術干預與HCC管理中免疫療法之間的複雜相互作用。</a:t>
+              <a:t>這項研究強調在評估免疫療法效果時需要考慮手術干預。</a:t>
             </a:r>
             <a:endParaRPr lang="en-US" sz="1000" dirty="0"/>
           </a:p>
@@ -15334,7 +15368,7 @@
                   <a:srgbClr val="1E1E1E"/>
                 </a:solidFill>
               </a:rPr>
-              <a:t>EN: The findings highlight the need to consider the timing of immunotherapy in relation to surgical interventions in HCC treatment. </a:t>
+              <a:t>EN: The findings suggest that surgical interventions can significantly impact the efficacy of adjuvant immunotherapy in HCC patients. Clinicians should consider the timing and type of immunotherapy in relation to surgical procedures. </a:t>
             </a:r>
             <a:endParaRPr lang="en-US" sz="1000" dirty="0"/>
           </a:p>
@@ -15351,7 +15385,7 @@
                   <a:srgbClr val="1E1E1E"/>
                 </a:solidFill>
               </a:rPr>
-              <a:t>ZH: 這些發現強調了在HCC治療中考慮免疫療法與手術干預時間安排的必要性。</a:t>
+              <a:t>ZH: 研究結果表明，手術干預可能會顯著影響HCC患者輔助免疫療法的有效性。臨床醫生應考慮免疫療法的時間和類型與手術程序的關係。</a:t>
             </a:r>
             <a:endParaRPr lang="en-US" sz="1000" dirty="0"/>
           </a:p>
@@ -15494,7 +15528,7 @@
                   <a:srgbClr val="1E1E1E"/>
                 </a:solidFill>
               </a:rPr>
-              <a:t>EN: Future research should explore the underlying mechanisms of how hepatectomy influences immunotherapy outcomes. </a:t>
+              <a:t>EN: Future research should focus on the mechanisms by which hepatectomy alters immunotherapy responses. Additionally, clinical trials are needed to optimize treatment strategies combining surgery and immunotherapy. </a:t>
             </a:r>
             <a:endParaRPr lang="en-US" sz="1000" dirty="0"/>
           </a:p>
@@ -15511,7 +15545,7 @@
                   <a:srgbClr val="1E1E1E"/>
                 </a:solidFill>
               </a:rPr>
-              <a:t>ZH: 未來的研究應該探討肝切除術如何影響免疫療法結果的潛在機制。</a:t>
+              <a:t>ZH: 未來的研究應著重於肝切除手術如何改變免疫療法反應的機制。此外，需要進行臨床試驗以優化結合手術和免疫療法的治療策略。</a:t>
             </a:r>
             <a:endParaRPr lang="en-US" sz="1000" dirty="0"/>
           </a:p>
@@ -15879,7 +15913,7 @@
                 <a:ea typeface="Arial" pitchFamily="34" charset="-122"/>
                 <a:cs typeface="Arial" pitchFamily="34" charset="-120"/>
               </a:rPr>
-              <a:t>Higher levels of intratumoral L. johnsonii correlate with increased abundance of IFNγ+PD-1+CD8+ T cells, enhancing the immune response.</a:t>
+              <a:t>Higher levels of intratumoral L. johnsonii correlate with increased abundance of IFNγ+PD-1+CD8+ T cells.</a:t>
             </a:r>
             <a:endParaRPr lang="en-US" sz="1000" dirty="0"/>
           </a:p>
@@ -15900,7 +15934,7 @@
                 <a:ea typeface="Arial" pitchFamily="34" charset="-122"/>
                 <a:cs typeface="Arial" pitchFamily="34" charset="-120"/>
               </a:rPr>
-              <a:t>Nicotinic acid, a metabolite of L. johnsonii, expands IFNγ+PD-1+CD8+ T cells and upregulates key markers of T cell activation and exhaustion.</a:t>
+              <a:t>Nicotinic acid, a metabolite from L. johnsonii, expands IFNγ+PD-1+CD8+ T cells and enhances effector and exhaustion markers.</a:t>
             </a:r>
             <a:endParaRPr lang="en-US" sz="1000" dirty="0"/>
           </a:p>
@@ -15921,7 +15955,7 @@
                 <a:ea typeface="Arial" pitchFamily="34" charset="-122"/>
                 <a:cs typeface="Arial" pitchFamily="34" charset="-120"/>
               </a:rPr>
-              <a:t>The combination of L. johnsonii or nicotinic acid with anti-PD-1 therapy synergistically inhibits tumor relapse and growth in mouse models.</a:t>
+              <a:t>L. johnsonii and nicotinic acid activate the NF-κB pathway, leading to increased IFNγ production and sustained PD-1 expression on CD8+ T cells.</a:t>
             </a:r>
             <a:endParaRPr lang="en-US" sz="1000" dirty="0"/>
           </a:p>
@@ -15942,7 +15976,7 @@
                 <a:ea typeface="Arial" pitchFamily="34" charset="-122"/>
                 <a:cs typeface="Arial" pitchFamily="34" charset="-120"/>
               </a:rPr>
-              <a:t>The antitumor efficacy of L. johnsonii is dependent on CD8+ T cells, highlighting their critical role in the immune response against HCC.</a:t>
+              <a:t>Combining L. johnsonii or nicotinic acid with anti-PD-1 therapy synergistically inhibits tumor relapse and growth.</a:t>
             </a:r>
             <a:endParaRPr lang="en-US" sz="1000" dirty="0"/>
           </a:p>
@@ -16024,7 +16058,7 @@
                 <a:ea typeface="Microsoft JhengHei" pitchFamily="34" charset="-122"/>
                 <a:cs typeface="Microsoft JhengHei" pitchFamily="34" charset="-120"/>
               </a:rPr>
-              <a:t>Lactobacillus johnsonii 在無復發的肝細胞癌（HCC）患者中富集，並作為無病生存的獨立預後指標。</a:t>
+              <a:t>Lactobacillus johnsonii 在無復發的肝細胞癌（HCC）患者中豐富，並作為無病生存的獨立預後指標。</a:t>
             </a:r>
             <a:endParaRPr lang="en-US" sz="1000" dirty="0"/>
           </a:p>
@@ -16045,7 +16079,7 @@
                 <a:ea typeface="Microsoft JhengHei" pitchFamily="34" charset="-122"/>
                 <a:cs typeface="Microsoft JhengHei" pitchFamily="34" charset="-120"/>
               </a:rPr>
-              <a:t>腫瘤內 L. johnsonii 的較高水平與 IFNγ+PD-1+CD8+ T 細胞的增加相關，增強免疫反應。</a:t>
+              <a:t>腫瘤內 L. johnsonii 的較高水平與 IFNγ+PD-1+CD8+ T 細胞的增加相關。</a:t>
             </a:r>
             <a:endParaRPr lang="en-US" sz="1000" dirty="0"/>
           </a:p>
@@ -16066,7 +16100,7 @@
                 <a:ea typeface="Microsoft JhengHei" pitchFamily="34" charset="-122"/>
                 <a:cs typeface="Microsoft JhengHei" pitchFamily="34" charset="-120"/>
               </a:rPr>
-              <a:t>L. johnsonii 的代謝產物煙酸擴展 IFNγ+PD-1+CD8+ T 細胞，並上調 T 細胞活化和耗竭的關鍵標記。</a:t>
+              <a:t>L. johnsonii 的代謝產物煙酸擴展 IFNγ+PD-1+CD8+ T 細胞並增強效應和耗竭標記。</a:t>
             </a:r>
             <a:endParaRPr lang="en-US" sz="1000" dirty="0"/>
           </a:p>
@@ -16087,7 +16121,7 @@
                 <a:ea typeface="Microsoft JhengHei" pitchFamily="34" charset="-122"/>
                 <a:cs typeface="Microsoft JhengHei" pitchFamily="34" charset="-120"/>
               </a:rPr>
-              <a:t>L. johnsonii 或煙酸與抗 PD-1 治療的聯合使用在小鼠模型中協同抑制腫瘤復發和增長。</a:t>
+              <a:t>L. johnsonii 和煙酸激活 NF-κB 通路，導致 IFNγ 產生增加和 CD8+ T 細胞上持續的 PD-1 表達。</a:t>
             </a:r>
             <a:endParaRPr lang="en-US" sz="1000" dirty="0"/>
           </a:p>
@@ -16108,7 +16142,7 @@
                 <a:ea typeface="Microsoft JhengHei" pitchFamily="34" charset="-122"/>
                 <a:cs typeface="Microsoft JhengHei" pitchFamily="34" charset="-120"/>
               </a:rPr>
-              <a:t>L. johnsonii 的抗腫瘤效能依賴於 CD8+ T 細胞，突顯其在 HCC 免疫反應中的關鍵角色。</a:t>
+              <a:t>將 L. johnsonii 或煙酸與抗 PD-1 治療結合可協同抑制腫瘤復發和生長。</a:t>
             </a:r>
             <a:endParaRPr lang="en-US" sz="1000" dirty="0"/>
           </a:p>
